--- a/domain-seminars/week08_risk_adjustment.pptx
+++ b/domain-seminars/week08_risk_adjustment.pptx
@@ -1506,7 +1506,7 @@
 </p:sldMaster>
 </file>
 
-<file path=ppt/slides/slide11.xml><?xml version="1.0" encoding="utf-8"?>
+<file path=ppt/slides/slide1.xml><?xml version="1.0" encoding="utf-8"?>
 <p:sld xmlns:a="http://schemas.openxmlformats.org/drawingml/2006/main" xmlns:p="http://schemas.openxmlformats.org/presentationml/2006/main" xmlns:r="http://schemas.openxmlformats.org/officeDocument/2006/relationships">
   <p:cSld>
     <p:spTree>
@@ -1600,7 +1600,7 @@
 </p:sld>
 </file>
 
-<file path=ppt/slides/slide12.xml><?xml version="1.0" encoding="utf-8"?>
+<file path=ppt/slides/slide2.xml><?xml version="1.0" encoding="utf-8"?>
 <p:sld xmlns:a="http://schemas.openxmlformats.org/drawingml/2006/main" xmlns:p="http://schemas.openxmlformats.org/presentationml/2006/main" xmlns:r="http://schemas.openxmlformats.org/officeDocument/2006/relationships">
   <p:cSld>
     <p:spTree>
@@ -1797,7 +1797,7 @@
 </p:sld>
 </file>
 
-<file path=ppt/slides/slide13.xml><?xml version="1.0" encoding="utf-8"?>
+<file path=ppt/slides/slide3.xml><?xml version="1.0" encoding="utf-8"?>
 <p:sld xmlns:a="http://schemas.openxmlformats.org/drawingml/2006/main" xmlns:p="http://schemas.openxmlformats.org/presentationml/2006/main" xmlns:r="http://schemas.openxmlformats.org/officeDocument/2006/relationships">
   <p:cSld>
     <p:spTree>
@@ -1994,7 +1994,7 @@
 </p:sld>
 </file>
 
-<file path=ppt/slides/slide14.xml><?xml version="1.0" encoding="utf-8"?>
+<file path=ppt/slides/slide4.xml><?xml version="1.0" encoding="utf-8"?>
 <p:sld xmlns:a="http://schemas.openxmlformats.org/drawingml/2006/main" xmlns:p="http://schemas.openxmlformats.org/presentationml/2006/main" xmlns:r="http://schemas.openxmlformats.org/officeDocument/2006/relationships">
   <p:cSld>
     <p:spTree>
@@ -2191,7 +2191,7 @@
 </p:sld>
 </file>
 
-<file path=ppt/slides/slide15.xml><?xml version="1.0" encoding="utf-8"?>
+<file path=ppt/slides/slide5.xml><?xml version="1.0" encoding="utf-8"?>
 <p:sld xmlns:a="http://schemas.openxmlformats.org/drawingml/2006/main" xmlns:p="http://schemas.openxmlformats.org/presentationml/2006/main" xmlns:r="http://schemas.openxmlformats.org/officeDocument/2006/relationships">
   <p:cSld>
     <p:spTree>
@@ -2388,7 +2388,7 @@
 </p:sld>
 </file>
 
-<file path=ppt/slides/slide16.xml><?xml version="1.0" encoding="utf-8"?>
+<file path=ppt/slides/slide6.xml><?xml version="1.0" encoding="utf-8"?>
 <p:sld xmlns:a="http://schemas.openxmlformats.org/drawingml/2006/main" xmlns:p="http://schemas.openxmlformats.org/presentationml/2006/main" xmlns:r="http://schemas.openxmlformats.org/officeDocument/2006/relationships">
   <p:cSld>
     <p:spTree>

--- a/domain-seminars/week08_risk_adjustment.pptx
+++ b/domain-seminars/week08_risk_adjustment.pptx
@@ -506,7 +506,7 @@
           <a:lstStyle/>
           <a:p>
             <a:r>
-              <a:t>Domain seminar for week 8: Risk Adjustment. It follows the course pattern: basics and terminology, where the topic sits in industry and policy, reform goals, how analytics is deployed, and how analytics drives decisions. Replace this note with your own opening remarks.</a:t>
+              <a:t>Domain seminar for week 8: Risk Adjustment. We will go through basics and terminology, where the topic is found across industry and policy, reform goals, how analytics is deployed, and how analytics drives decisions. Provide opening remarks here.</a:t>
             </a:r>
           </a:p>
         </p:txBody>

--- a/domain-seminars/week08_risk_adjustment.pptx
+++ b/domain-seminars/week08_risk_adjustment.pptx
@@ -11,6 +11,7 @@
     <p:sldId id="269" r:id="rId20"/>
     <p:sldId id="270" r:id="rId21"/>
     <p:sldId id="271" r:id="rId22"/>
+    <p:sldId id="272" r:id="rId11"/>
   </p:sldIdLst>
   <p:notesMasterIdLst>
     <p:notesMasterId r:id="rId12"/>
@@ -857,6 +858,76 @@
           <a:p>
             <a:r>
               <a:t>Outreach capacity is limited, so the question is which members to call first. Prediction models rank members by their chance of missing recapture; what matters most is how accurate the top of the list is. The right outcome is a visit where a clinician evaluates the condition, not a code.</a:t>
+            </a:r>
+          </a:p>
+        </p:txBody>
+      </p:sp>
+      <p:sp>
+        <p:nvSpPr>
+          <p:cNvPr id="4" name="Slide Number Placeholder 3"/>
+          <p:cNvSpPr>
+            <a:spLocks noGrp="1"/>
+          </p:cNvSpPr>
+          <p:nvPr>
+            <p:ph type="sldNum" idx="5" sz="quarter"/>
+          </p:nvPr>
+        </p:nvSpPr>
+        <p:spPr/>
+      </p:sp>
+    </p:spTree>
+  </p:cSld>
+  <p:clrMapOvr>
+    <a:masterClrMapping/>
+  </p:clrMapOvr>
+</p:notes>
+</file>
+
+<file path=ppt/notesSlides/notesSlide7.xml><?xml version="1.0" encoding="utf-8"?>
+<p:notes xmlns:a="http://schemas.openxmlformats.org/drawingml/2006/main" xmlns:p="http://schemas.openxmlformats.org/presentationml/2006/main" xmlns:r="http://schemas.openxmlformats.org/officeDocument/2006/relationships">
+  <p:cSld>
+    <p:spTree>
+      <p:nvGrpSpPr>
+        <p:cNvPr id="1" name=""/>
+        <p:cNvGrpSpPr/>
+        <p:nvPr/>
+      </p:nvGrpSpPr>
+      <p:grpSpPr>
+        <a:xfrm>
+          <a:off x="0" y="0"/>
+          <a:ext cx="0" cy="0"/>
+          <a:chOff x="0" y="0"/>
+          <a:chExt cx="0" cy="0"/>
+        </a:xfrm>
+      </p:grpSpPr>
+      <p:sp>
+        <p:nvSpPr>
+          <p:cNvPr id="2" name="Slide Image Placeholder 1"/>
+          <p:cNvSpPr>
+            <a:spLocks noGrp="1"/>
+          </p:cNvSpPr>
+          <p:nvPr>
+            <p:ph type="sldImg" idx="2"/>
+          </p:nvPr>
+        </p:nvSpPr>
+        <p:spPr/>
+      </p:sp>
+      <p:sp>
+        <p:nvSpPr>
+          <p:cNvPr id="3" name="Notes Placeholder 2"/>
+          <p:cNvSpPr>
+            <a:spLocks noGrp="1"/>
+          </p:cNvSpPr>
+          <p:nvPr>
+            <p:ph type="body" idx="3" sz="quarter"/>
+          </p:nvPr>
+        </p:nvSpPr>
+        <p:spPr/>
+        <p:txBody>
+          <a:bodyPr/>
+          <a:lstStyle/>
+          <a:p>
+            <a:r>
+              <a:t>Give students a few minutes to write an answer drawn from their own experience and career, then ask two or three to share. Connect their examples back to this seminar's content. In an online section, post the same question to the discussion board.</a:t>
             </a:r>
           </a:p>
         </p:txBody>
@@ -2572,6 +2643,167 @@
             <a:fld id="{F7021451-1387-4CA6-816F-3879F97B5CBC}" type="slidenum">
               <a:rPr b="0" lang="en-US"/>
               <a:t>6</a:t>
+            </a:fld>
+            <a:endParaRPr lang="en-US"/>
+          </a:p>
+        </p:txBody>
+      </p:sp>
+    </p:spTree>
+  </p:cSld>
+  <p:clrMapOvr>
+    <a:masterClrMapping/>
+  </p:clrMapOvr>
+</p:sld>
+</file>
+
+<file path=ppt/slides/slide7.xml><?xml version="1.0" encoding="utf-8"?>
+<p:sld xmlns:a="http://schemas.openxmlformats.org/drawingml/2006/main" xmlns:p="http://schemas.openxmlformats.org/presentationml/2006/main" xmlns:r="http://schemas.openxmlformats.org/officeDocument/2006/relationships">
+  <p:cSld>
+    <p:spTree>
+      <p:nvGrpSpPr>
+        <p:cNvPr id="1" name=""/>
+        <p:cNvGrpSpPr/>
+        <p:nvPr/>
+      </p:nvGrpSpPr>
+      <p:grpSpPr/>
+      <p:sp>
+        <p:nvSpPr>
+          <p:cNvPr id="2" name="Text 0"/>
+          <p:cNvSpPr/>
+          <p:nvPr>
+            <p:ph idx="100" type="title" hasCustomPrompt="1"/>
+          </p:nvPr>
+        </p:nvSpPr>
+        <p:spPr>
+          <a:xfrm>
+            <a:off x="731520" y="457200"/>
+            <a:ext cx="10698480" cy="822960"/>
+          </a:xfrm>
+          <a:prstGeom prst="rect">
+            <a:avLst/>
+          </a:prstGeom>
+          <a:noFill/>
+          <a:ln/>
+        </p:spPr>
+        <p:txBody>
+          <a:bodyPr wrap="square" lIns="0" tIns="0" rIns="0" bIns="0" rtlCol="0" anchor="t"/>
+          <a:lstStyle/>
+          <a:p>
+            <a:pPr algn="l" indent="0" marL="0">
+              <a:buNone/>
+            </a:pPr>
+            <a:r>
+              <a:rPr lang="en-US" sz="3200" b="1" dirty="0">
+                <a:solidFill>
+                  <a:srgbClr val="FFFFFF"/>
+                </a:solidFill>
+              </a:rPr>
+              <a:t>Discussion</a:t>
+            </a:r>
+            <a:endParaRPr lang="en-US" sz="3200" dirty="0"/>
+          </a:p>
+        </p:txBody>
+      </p:sp>
+      <p:sp>
+        <p:nvSpPr>
+          <p:cNvPr id="3" name="Text 0"/>
+          <p:cNvSpPr/>
+          <p:nvPr>
+            <p:ph idx="101" type="body" hasCustomPrompt="1"/>
+          </p:nvPr>
+        </p:nvSpPr>
+        <p:spPr>
+          <a:xfrm>
+            <a:off x="731520" y="1554480"/>
+            <a:ext cx="10698480" cy="4754880"/>
+          </a:xfrm>
+          <a:prstGeom prst="rect">
+            <a:avLst/>
+          </a:prstGeom>
+          <a:noFill/>
+          <a:ln/>
+        </p:spPr>
+        <p:txBody>
+          <a:bodyPr wrap="square" rtlCol="0" anchor="t"/>
+          <a:lstStyle/>
+          <a:p>
+            <a:pPr algn="l" marL="342900" indent="-342900">
+              <a:spcAft>
+                <a:spcPts val="1000"/>
+              </a:spcAft>
+              <a:buSzPct val="100000"/>
+              <a:buChar char="•"/>
+            </a:pPr>
+            <a:r>
+              <a:rPr lang="en-US" sz="2400" dirty="0">
+                <a:solidFill>
+                  <a:srgbClr val="FFFFFF"/>
+                </a:solidFill>
+              </a:rPr>
+              <a:t>Where have you seen documentation miss how sick a patient really is, and what process change would fix it without overcoding?</a:t>
+            </a:r>
+            <a:endParaRPr lang="en-US" sz="2400" dirty="0"/>
+          </a:p>
+          <a:p>
+            <a:pPr algn="l" marL="342900" indent="-342900">
+              <a:spcAft>
+                <a:spcPts val="1000"/>
+              </a:spcAft>
+              <a:buSzPct val="100000"/>
+              <a:buChar char="•"/>
+            </a:pPr>
+            <a:r>
+              <a:rPr lang="en-US" sz="2400" dirty="0">
+                <a:solidFill>
+                  <a:srgbClr val="FFFFFF"/>
+                </a:solidFill>
+              </a:rPr>
+              <a:t>Draw on your own experience and career, and apply today's seminar to that setting.</a:t>
+            </a:r>
+            <a:endParaRPr lang="en-US" sz="2400" dirty="0"/>
+          </a:p>
+        </p:txBody>
+      </p:sp>
+      <p:sp>
+        <p:nvSpPr>
+          <p:cNvPr id="25" name="Slide Number Placeholder 0"/>
+          <p:cNvSpPr>
+            <a:spLocks noGrp="1"/>
+          </p:cNvSpPr>
+          <p:nvPr>
+            <p:ph type="sldNum" sz="quarter" idx="4294967295"/>
+          </p:nvPr>
+        </p:nvSpPr>
+        <p:spPr>
+          <a:xfrm>
+            <a:off x="10972800" y="6400800"/>
+            <a:ext cx="548640" cy="274320"/>
+          </a:xfrm>
+          <a:prstGeom prst="rect">
+            <a:avLst/>
+          </a:prstGeom>
+          <a:extLst>
+            <a:ext uri="{C572A759-6A51-4108-AA02-DFA0A04FC94B}">
+              <ma14:wrappingTextBoxFlag xmlns:ma14="http://schemas.microsoft.com/office/mac/drawingml/2011/main" val="0"/>
+            </a:ext>
+          </a:extLst>
+        </p:spPr>
+        <p:txBody>
+          <a:bodyPr/>
+          <a:lstStyle>
+            <a:lvl1pPr>
+              <a:defRPr sz="1000">
+                <a:solidFill>
+                  <a:srgbClr val="BFBFBF"/>
+                </a:solidFill>
+              </a:defRPr>
+            </a:lvl1pPr>
+          </a:lstStyle>
+          <a:p>
+            <a:pPr algn="r"/>
+            <a:fld id="{F7021451-1387-4CA6-816F-3879F97B5CBC}" type="slidenum">
+              <a:rPr b="0" lang="en-US"/>
+              <a:t>7</a:t>
             </a:fld>
             <a:endParaRPr lang="en-US"/>
           </a:p>

--- a/domain-seminars/week08_risk_adjustment.pptx
+++ b/domain-seminars/week08_risk_adjustment.pptx
@@ -1619,7 +1619,7 @@
                   <a:srgbClr val="FFFFFF"/>
                 </a:solidFill>
               </a:rPr>
-              <a:t>Risk Adjustment</a:t>
+              <a:t>Week 8: Risk Adjustment</a:t>
             </a:r>
             <a:endParaRPr lang="en-US" sz="4000" dirty="0"/>
           </a:p>
